--- a/business-docs/MicroPulse-Pitch-Deck-IS.pptx
+++ b/business-docs/MicroPulse-Pitch-Deck-IS.pptx
@@ -15923,7 +15923,7 @@
                 </a:solidFill>
                 <a:latin typeface="Arial Black"/>
               </a:rPr>
-              <a:t>Niðurstöður úr pilot-hópi</a:t>
+              <a:t>Hvernig readiness er reiknuð</a:t>
             </a:r>
           </a:p>
         </p:txBody>
@@ -15993,7 +15993,7 @@
                 </a:solidFill>
                 <a:latin typeface="Calibri"/>
               </a:rPr>
-              <a:t>Úrvalsdeildarklúbbur · 24 leikmenn · 8 vikur</a:t>
+              <a:t>Þrjú scoring-módel  ·  Daglegt per leikmaður  ·  Alltaf útskýranlegt</a:t>
             </a:r>
           </a:p>
         </p:txBody>
@@ -16120,7 +16120,7 @@
                 </a:solidFill>
                 <a:latin typeface="Arial Black"/>
               </a:rPr>
-              <a:t>-38%</a:t>
+              <a:t>ACWR</a:t>
             </a:r>
           </a:p>
         </p:txBody>
@@ -16155,7 +16155,7 @@
                 </a:solidFill>
                 <a:latin typeface="Arial Black"/>
               </a:rPr>
-              <a:t>soft-tissue meiðsli</a:t>
+              <a:t>Acute:Chronic hlutfall</a:t>
             </a:r>
           </a:p>
         </p:txBody>
@@ -16190,7 +16190,7 @@
                 </a:solidFill>
                 <a:latin typeface="Calibri"/>
               </a:rPr>
-              <a:t>Samanburður við sama tíma árið áður</a:t>
+              <a:t>Skv. Gabbett 2016 / Hulin 2016</a:t>
             </a:r>
           </a:p>
         </p:txBody>
@@ -16317,7 +16317,7 @@
                 </a:solidFill>
                 <a:latin typeface="Arial Black"/>
               </a:rPr>
-              <a:t>96%</a:t>
+              <a:t>MLI</a:t>
             </a:r>
           </a:p>
         </p:txBody>
@@ -16352,7 +16352,7 @@
                 </a:solidFill>
                 <a:latin typeface="Arial Black"/>
               </a:rPr>
-              <a:t>dagleg innritun</a:t>
+              <a:t>Mechanical Load Index</a:t>
             </a:r>
           </a:p>
         </p:txBody>
@@ -16387,7 +16387,7 @@
                 </a:solidFill>
                 <a:latin typeface="Calibri"/>
               </a:rPr>
-              <a:t>Leikmannahlutfall sem mætir á hverjum degi</a:t>
+              <a:t>Decel, accel, CoD, PlayerLoad density</a:t>
             </a:r>
           </a:p>
         </p:txBody>
@@ -16514,7 +16514,7 @@
                 </a:solidFill>
                 <a:latin typeface="Arial Black"/>
               </a:rPr>
-              <a:t>15 mín</a:t>
+              <a:t>CMJ</a:t>
             </a:r>
           </a:p>
         </p:txBody>
@@ -16549,7 +16549,7 @@
                 </a:solidFill>
                 <a:latin typeface="Arial Black"/>
               </a:rPr>
-              <a:t>tími sparað daglega</a:t>
+              <a:t>Force-plate freshness</a:t>
             </a:r>
           </a:p>
         </p:txBody>
@@ -16584,7 +16584,7 @@
                 </a:solidFill>
                 <a:latin typeface="Calibri"/>
               </a:rPr>
-              <a:t>Fyrir aðstoðarþjálfara í gagnasöfnun</a:t>
+              <a:t>Asymmetry, RSI, contraction time</a:t>
             </a:r>
           </a:p>
         </p:txBody>
@@ -16619,7 +16619,7 @@
                 </a:solidFill>
                 <a:latin typeface="Calibri"/>
               </a:rPr>
-              <a:t>"Fyrsta tólið sem aðstoðarþjálfarar opna á morgnana."</a:t>
+              <a:t>"Öll þrjú móta eitt GREEN / YELLOW / RED state per leikmann."</a:t>
             </a:r>
           </a:p>
         </p:txBody>
@@ -16654,7 +16654,7 @@
                 </a:solidFill>
                 <a:latin typeface="Calibri"/>
               </a:rPr>
-              <a:t>— Sjúkraþjálfari, pilot-klúbbur</a:t>
+              <a:t>— Adaptive Training Engine</a:t>
             </a:r>
           </a:p>
         </p:txBody>
